--- a/kit/assets/base-wide.pptx
+++ b/kit/assets/base-wide.pptx
@@ -586,10 +586,10 @@
         <a:srgbClr val="00A0E9"/>
       </a:accent3>
       <a:accent4>
-        <a:srgbClr val="F38B1F"/>
+        <a:srgbClr val="A6A6A6"/>
       </a:accent4>
       <a:accent5>
-        <a:srgbClr val="4EA347"/>
+        <a:srgbClr val="D9D9D9"/>
       </a:accent5>
       <a:accent6>
         <a:srgbClr val="6B7983"/>
